--- a/population flowchart.pptx
+++ b/population flowchart.pptx
@@ -122,6 +122,46 @@
 
 <file path=ppt/changesInfos/changesInfo1.xml><?xml version="1.0" encoding="utf-8"?>
 <pc:chgInfo xmlns:a="http://schemas.openxmlformats.org/drawingml/2006/main" xmlns:r="http://schemas.openxmlformats.org/officeDocument/2006/relationships" xmlns:ac="http://schemas.microsoft.com/office/drawing/2013/main/command" xmlns:pc="http://schemas.microsoft.com/office/powerpoint/2013/main/command">
+  <pc:docChgLst>
+    <pc:chgData userId="85a689e334301df8" providerId="LiveId" clId="{CB95FAE5-76BA-4115-8A9B-180D4FF372D4}"/>
+    <pc:docChg chg="undo modSld">
+      <pc:chgData name="" userId="85a689e334301df8" providerId="LiveId" clId="{CB95FAE5-76BA-4115-8A9B-180D4FF372D4}" dt="2025-08-12T03:39:55.244" v="164" actId="20577"/>
+      <pc:docMkLst>
+        <pc:docMk/>
+      </pc:docMkLst>
+      <pc:sldChg chg="addSp delSp modSp">
+        <pc:chgData name="" userId="85a689e334301df8" providerId="LiveId" clId="{CB95FAE5-76BA-4115-8A9B-180D4FF372D4}" dt="2025-08-12T03:39:55.244" v="164" actId="20577"/>
+        <pc:sldMkLst>
+          <pc:docMk/>
+          <pc:sldMk cId="3379159851" sldId="256"/>
+        </pc:sldMkLst>
+      </pc:sldChg>
+    </pc:docChg>
+  </pc:docChgLst>
+  <pc:docChgLst>
+    <pc:chgData name="희정 황" userId="85a689e334301df8" providerId="LiveId" clId="{B079C182-05B2-BC4B-B390-6CF389B0C685}"/>
+    <pc:docChg chg="undo custSel modSld">
+      <pc:chgData name="희정 황" userId="85a689e334301df8" providerId="LiveId" clId="{B079C182-05B2-BC4B-B390-6CF389B0C685}" dt="2025-09-10T01:50:20.710" v="3" actId="21"/>
+      <pc:docMkLst>
+        <pc:docMk/>
+      </pc:docMkLst>
+      <pc:sldChg chg="addSp delSp modSp mod">
+        <pc:chgData name="희정 황" userId="85a689e334301df8" providerId="LiveId" clId="{B079C182-05B2-BC4B-B390-6CF389B0C685}" dt="2025-09-10T01:50:20.710" v="3" actId="21"/>
+        <pc:sldMkLst>
+          <pc:docMk/>
+          <pc:sldMk cId="3379159851" sldId="256"/>
+        </pc:sldMkLst>
+        <pc:grpChg chg="mod">
+          <ac:chgData name="희정 황" userId="85a689e334301df8" providerId="LiveId" clId="{B079C182-05B2-BC4B-B390-6CF389B0C685}" dt="2025-09-10T01:50:02.329" v="1" actId="1076"/>
+          <ac:grpSpMkLst>
+            <pc:docMk/>
+            <pc:sldMk cId="3379159851" sldId="256"/>
+            <ac:grpSpMk id="2" creationId="{ADF61DAC-7BD5-4296-8E65-9DF1D2062169}"/>
+          </ac:grpSpMkLst>
+        </pc:grpChg>
+      </pc:sldChg>
+    </pc:docChg>
+  </pc:docChgLst>
   <pc:docChgLst>
     <pc:chgData name="황희정 서울대_" userId="85a689e334301df8" providerId="LiveId" clId="{DB26F11F-283F-0A40-B859-FD1C84CD5AFE}"/>
     <pc:docChg chg="undo custSel modSld">
@@ -250,46 +290,6 @@
       </pc:sldChg>
     </pc:docChg>
   </pc:docChgLst>
-  <pc:docChgLst>
-    <pc:chgData name="희정 황" userId="85a689e334301df8" providerId="LiveId" clId="{B079C182-05B2-BC4B-B390-6CF389B0C685}"/>
-    <pc:docChg chg="undo custSel modSld">
-      <pc:chgData name="희정 황" userId="85a689e334301df8" providerId="LiveId" clId="{B079C182-05B2-BC4B-B390-6CF389B0C685}" dt="2025-09-10T01:50:20.710" v="3" actId="21"/>
-      <pc:docMkLst>
-        <pc:docMk/>
-      </pc:docMkLst>
-      <pc:sldChg chg="addSp delSp modSp mod">
-        <pc:chgData name="희정 황" userId="85a689e334301df8" providerId="LiveId" clId="{B079C182-05B2-BC4B-B390-6CF389B0C685}" dt="2025-09-10T01:50:20.710" v="3" actId="21"/>
-        <pc:sldMkLst>
-          <pc:docMk/>
-          <pc:sldMk cId="3379159851" sldId="256"/>
-        </pc:sldMkLst>
-        <pc:grpChg chg="mod">
-          <ac:chgData name="희정 황" userId="85a689e334301df8" providerId="LiveId" clId="{B079C182-05B2-BC4B-B390-6CF389B0C685}" dt="2025-09-10T01:50:02.329" v="1" actId="1076"/>
-          <ac:grpSpMkLst>
-            <pc:docMk/>
-            <pc:sldMk cId="3379159851" sldId="256"/>
-            <ac:grpSpMk id="2" creationId="{ADF61DAC-7BD5-4296-8E65-9DF1D2062169}"/>
-          </ac:grpSpMkLst>
-        </pc:grpChg>
-      </pc:sldChg>
-    </pc:docChg>
-  </pc:docChgLst>
-  <pc:docChgLst>
-    <pc:chgData userId="85a689e334301df8" providerId="LiveId" clId="{CB95FAE5-76BA-4115-8A9B-180D4FF372D4}"/>
-    <pc:docChg chg="undo modSld">
-      <pc:chgData name="" userId="85a689e334301df8" providerId="LiveId" clId="{CB95FAE5-76BA-4115-8A9B-180D4FF372D4}" dt="2025-08-12T03:39:55.244" v="164" actId="20577"/>
-      <pc:docMkLst>
-        <pc:docMk/>
-      </pc:docMkLst>
-      <pc:sldChg chg="addSp delSp modSp">
-        <pc:chgData name="" userId="85a689e334301df8" providerId="LiveId" clId="{CB95FAE5-76BA-4115-8A9B-180D4FF372D4}" dt="2025-08-12T03:39:55.244" v="164" actId="20577"/>
-        <pc:sldMkLst>
-          <pc:docMk/>
-          <pc:sldMk cId="3379159851" sldId="256"/>
-        </pc:sldMkLst>
-      </pc:sldChg>
-    </pc:docChg>
-  </pc:docChgLst>
 </pc:chgInfo>
 </file>
 
@@ -440,7 +440,7 @@
           <a:p>
             <a:fld id="{E64F20A7-9C2B-044A-BEB4-58D0C860C054}" type="datetimeFigureOut">
               <a:rPr kumimoji="1" lang="ko-KR" altLang="en-US" smtClean="0"/>
-              <a:t>2025. 10. 5.</a:t>
+              <a:t>2025. 12. 16.</a:t>
             </a:fld>
             <a:endParaRPr kumimoji="1" lang="ko-KR" altLang="en-US"/>
           </a:p>
@@ -638,7 +638,7 @@
           <a:p>
             <a:fld id="{E64F20A7-9C2B-044A-BEB4-58D0C860C054}" type="datetimeFigureOut">
               <a:rPr kumimoji="1" lang="ko-KR" altLang="en-US" smtClean="0"/>
-              <a:t>2025. 10. 5.</a:t>
+              <a:t>2025. 12. 16.</a:t>
             </a:fld>
             <a:endParaRPr kumimoji="1" lang="ko-KR" altLang="en-US"/>
           </a:p>
@@ -846,7 +846,7 @@
           <a:p>
             <a:fld id="{E64F20A7-9C2B-044A-BEB4-58D0C860C054}" type="datetimeFigureOut">
               <a:rPr kumimoji="1" lang="ko-KR" altLang="en-US" smtClean="0"/>
-              <a:t>2025. 10. 5.</a:t>
+              <a:t>2025. 12. 16.</a:t>
             </a:fld>
             <a:endParaRPr kumimoji="1" lang="ko-KR" altLang="en-US"/>
           </a:p>
@@ -1044,7 +1044,7 @@
           <a:p>
             <a:fld id="{E64F20A7-9C2B-044A-BEB4-58D0C860C054}" type="datetimeFigureOut">
               <a:rPr kumimoji="1" lang="ko-KR" altLang="en-US" smtClean="0"/>
-              <a:t>2025. 10. 5.</a:t>
+              <a:t>2025. 12. 16.</a:t>
             </a:fld>
             <a:endParaRPr kumimoji="1" lang="ko-KR" altLang="en-US"/>
           </a:p>
@@ -1319,7 +1319,7 @@
           <a:p>
             <a:fld id="{E64F20A7-9C2B-044A-BEB4-58D0C860C054}" type="datetimeFigureOut">
               <a:rPr kumimoji="1" lang="ko-KR" altLang="en-US" smtClean="0"/>
-              <a:t>2025. 10. 5.</a:t>
+              <a:t>2025. 12. 16.</a:t>
             </a:fld>
             <a:endParaRPr kumimoji="1" lang="ko-KR" altLang="en-US"/>
           </a:p>
@@ -1584,7 +1584,7 @@
           <a:p>
             <a:fld id="{E64F20A7-9C2B-044A-BEB4-58D0C860C054}" type="datetimeFigureOut">
               <a:rPr kumimoji="1" lang="ko-KR" altLang="en-US" smtClean="0"/>
-              <a:t>2025. 10. 5.</a:t>
+              <a:t>2025. 12. 16.</a:t>
             </a:fld>
             <a:endParaRPr kumimoji="1" lang="ko-KR" altLang="en-US"/>
           </a:p>
@@ -1996,7 +1996,7 @@
           <a:p>
             <a:fld id="{E64F20A7-9C2B-044A-BEB4-58D0C860C054}" type="datetimeFigureOut">
               <a:rPr kumimoji="1" lang="ko-KR" altLang="en-US" smtClean="0"/>
-              <a:t>2025. 10. 5.</a:t>
+              <a:t>2025. 12. 16.</a:t>
             </a:fld>
             <a:endParaRPr kumimoji="1" lang="ko-KR" altLang="en-US"/>
           </a:p>
@@ -2137,7 +2137,7 @@
           <a:p>
             <a:fld id="{E64F20A7-9C2B-044A-BEB4-58D0C860C054}" type="datetimeFigureOut">
               <a:rPr kumimoji="1" lang="ko-KR" altLang="en-US" smtClean="0"/>
-              <a:t>2025. 10. 5.</a:t>
+              <a:t>2025. 12. 16.</a:t>
             </a:fld>
             <a:endParaRPr kumimoji="1" lang="ko-KR" altLang="en-US"/>
           </a:p>
@@ -2250,7 +2250,7 @@
           <a:p>
             <a:fld id="{E64F20A7-9C2B-044A-BEB4-58D0C860C054}" type="datetimeFigureOut">
               <a:rPr kumimoji="1" lang="ko-KR" altLang="en-US" smtClean="0"/>
-              <a:t>2025. 10. 5.</a:t>
+              <a:t>2025. 12. 16.</a:t>
             </a:fld>
             <a:endParaRPr kumimoji="1" lang="ko-KR" altLang="en-US"/>
           </a:p>
@@ -2561,7 +2561,7 @@
           <a:p>
             <a:fld id="{E64F20A7-9C2B-044A-BEB4-58D0C860C054}" type="datetimeFigureOut">
               <a:rPr kumimoji="1" lang="ko-KR" altLang="en-US" smtClean="0"/>
-              <a:t>2025. 10. 5.</a:t>
+              <a:t>2025. 12. 16.</a:t>
             </a:fld>
             <a:endParaRPr kumimoji="1" lang="ko-KR" altLang="en-US"/>
           </a:p>
@@ -2849,7 +2849,7 @@
           <a:p>
             <a:fld id="{E64F20A7-9C2B-044A-BEB4-58D0C860C054}" type="datetimeFigureOut">
               <a:rPr kumimoji="1" lang="ko-KR" altLang="en-US" smtClean="0"/>
-              <a:t>2025. 10. 5.</a:t>
+              <a:t>2025. 12. 16.</a:t>
             </a:fld>
             <a:endParaRPr kumimoji="1" lang="ko-KR" altLang="en-US"/>
           </a:p>
@@ -3090,7 +3090,7 @@
           <a:p>
             <a:fld id="{E64F20A7-9C2B-044A-BEB4-58D0C860C054}" type="datetimeFigureOut">
               <a:rPr kumimoji="1" lang="ko-KR" altLang="en-US" smtClean="0"/>
-              <a:t>2025. 10. 5.</a:t>
+              <a:t>2025. 12. 16.</a:t>
             </a:fld>
             <a:endParaRPr kumimoji="1" lang="ko-KR" altLang="en-US"/>
           </a:p>
@@ -3521,10 +3521,10 @@
         </p:nvGrpSpPr>
         <p:grpSpPr>
           <a:xfrm>
-            <a:off x="103643" y="-2774643"/>
-            <a:ext cx="11984714" cy="9899603"/>
+            <a:off x="103643" y="-1007836"/>
+            <a:ext cx="11984714" cy="8873672"/>
             <a:chOff x="1223683" y="242047"/>
-            <a:chExt cx="9266120" cy="9899603"/>
+            <a:chExt cx="9266120" cy="8873672"/>
           </a:xfrm>
         </p:grpSpPr>
         <p:sp>
@@ -5605,255 +5605,6 @@
           <p:spPr>
             <a:xfrm>
               <a:off x="3695700" y="8282827"/>
-              <a:ext cx="2808000" cy="0"/>
-            </a:xfrm>
-            <a:prstGeom prst="straightConnector1">
-              <a:avLst/>
-            </a:prstGeom>
-            <a:ln>
-              <a:solidFill>
-                <a:schemeClr val="tx1"/>
-              </a:solidFill>
-              <a:tailEnd type="triangle"/>
-            </a:ln>
-          </p:spPr>
-          <p:style>
-            <a:lnRef idx="2">
-              <a:schemeClr val="accent1"/>
-            </a:lnRef>
-            <a:fillRef idx="0">
-              <a:schemeClr val="accent1"/>
-            </a:fillRef>
-            <a:effectRef idx="1">
-              <a:schemeClr val="accent1"/>
-            </a:effectRef>
-            <a:fontRef idx="minor">
-              <a:schemeClr val="tx1"/>
-            </a:fontRef>
-          </p:style>
-        </p:cxnSp>
-        <p:sp>
-          <p:nvSpPr>
-            <p:cNvPr id="3" name="직사각형 2">
-              <a:extLst>
-                <a:ext uri="{FF2B5EF4-FFF2-40B4-BE49-F238E27FC236}">
-                  <a16:creationId xmlns:a16="http://schemas.microsoft.com/office/drawing/2014/main" id="{6685D757-47AF-608D-9661-1FCE652C5161}"/>
-                </a:ext>
-              </a:extLst>
-            </p:cNvPr>
-            <p:cNvSpPr/>
-            <p:nvPr/>
-          </p:nvSpPr>
-          <p:spPr>
-            <a:xfrm>
-              <a:off x="1223683" y="9520357"/>
-              <a:ext cx="4944034" cy="621293"/>
-            </a:xfrm>
-            <a:prstGeom prst="rect">
-              <a:avLst/>
-            </a:prstGeom>
-            <a:solidFill>
-              <a:schemeClr val="bg1"/>
-            </a:solidFill>
-            <a:ln w="28575">
-              <a:solidFill>
-                <a:schemeClr val="tx1"/>
-              </a:solidFill>
-            </a:ln>
-          </p:spPr>
-          <p:style>
-            <a:lnRef idx="2">
-              <a:schemeClr val="accent1">
-                <a:shade val="15000"/>
-              </a:schemeClr>
-            </a:lnRef>
-            <a:fillRef idx="1">
-              <a:schemeClr val="accent1"/>
-            </a:fillRef>
-            <a:effectRef idx="0">
-              <a:schemeClr val="accent1"/>
-            </a:effectRef>
-            <a:fontRef idx="minor">
-              <a:schemeClr val="lt1"/>
-            </a:fontRef>
-          </p:style>
-          <p:txBody>
-            <a:bodyPr rtlCol="0" anchor="ctr"/>
-            <a:lstStyle/>
-            <a:p>
-              <a:pPr algn="ctr"/>
-              <a:r>
-                <a:rPr kumimoji="1" lang="en-US" altLang="ko-KR" sz="1600" dirty="0">
-                  <a:solidFill>
-                    <a:schemeClr val="tx1"/>
-                  </a:solidFill>
-                  <a:latin typeface="Arial" panose="020B0604020202020204" pitchFamily="34" charset="0"/>
-                  <a:cs typeface="Arial" panose="020B0604020202020204" pitchFamily="34" charset="0"/>
-                </a:rPr>
-                <a:t>Final study population</a:t>
-              </a:r>
-            </a:p>
-            <a:p>
-              <a:pPr algn="ctr"/>
-              <a:r>
-                <a:rPr kumimoji="1" lang="en-US" altLang="ko-KR" sz="1600" dirty="0">
-                  <a:solidFill>
-                    <a:schemeClr val="tx1"/>
-                  </a:solidFill>
-                  <a:latin typeface="Arial" panose="020B0604020202020204" pitchFamily="34" charset="0"/>
-                  <a:cs typeface="Arial" panose="020B0604020202020204" pitchFamily="34" charset="0"/>
-                </a:rPr>
-                <a:t>(N = 23,040)</a:t>
-              </a:r>
-            </a:p>
-          </p:txBody>
-        </p:sp>
-        <p:sp>
-          <p:nvSpPr>
-            <p:cNvPr id="5" name="직사각형 4">
-              <a:extLst>
-                <a:ext uri="{FF2B5EF4-FFF2-40B4-BE49-F238E27FC236}">
-                  <a16:creationId xmlns:a16="http://schemas.microsoft.com/office/drawing/2014/main" id="{F0BC5214-2E64-BDDA-610F-6D114886C188}"/>
-                </a:ext>
-              </a:extLst>
-            </p:cNvPr>
-            <p:cNvSpPr/>
-            <p:nvPr/>
-          </p:nvSpPr>
-          <p:spPr>
-            <a:xfrm>
-              <a:off x="6502799" y="8998111"/>
-              <a:ext cx="3987004" cy="621293"/>
-            </a:xfrm>
-            <a:prstGeom prst="rect">
-              <a:avLst/>
-            </a:prstGeom>
-            <a:solidFill>
-              <a:schemeClr val="bg1"/>
-            </a:solidFill>
-            <a:ln w="28575">
-              <a:solidFill>
-                <a:schemeClr val="tx1"/>
-              </a:solidFill>
-            </a:ln>
-          </p:spPr>
-          <p:style>
-            <a:lnRef idx="2">
-              <a:schemeClr val="accent1">
-                <a:shade val="15000"/>
-              </a:schemeClr>
-            </a:lnRef>
-            <a:fillRef idx="1">
-              <a:schemeClr val="accent1"/>
-            </a:fillRef>
-            <a:effectRef idx="0">
-              <a:schemeClr val="accent1"/>
-            </a:effectRef>
-            <a:fontRef idx="minor">
-              <a:schemeClr val="lt1"/>
-            </a:fontRef>
-          </p:style>
-          <p:txBody>
-            <a:bodyPr rtlCol="0" anchor="ctr"/>
-            <a:lstStyle/>
-            <a:p>
-              <a:pPr algn="ctr"/>
-              <a:r>
-                <a:rPr kumimoji="1" lang="en-US" altLang="ko-KR" sz="1600">
-                  <a:solidFill>
-                    <a:schemeClr val="tx1"/>
-                  </a:solidFill>
-                  <a:latin typeface="Arial" panose="020B0604020202020204" pitchFamily="34" charset="0"/>
-                  <a:cs typeface="Arial" panose="020B0604020202020204" pitchFamily="34" charset="0"/>
-                </a:rPr>
-                <a:t>Duplicate participants only most recent visit retained</a:t>
-              </a:r>
-            </a:p>
-            <a:p>
-              <a:pPr algn="ctr"/>
-              <a:r>
-                <a:rPr kumimoji="1" lang="en-US" altLang="ko-KR" sz="1600">
-                  <a:solidFill>
-                    <a:schemeClr val="tx1"/>
-                  </a:solidFill>
-                  <a:latin typeface="Arial" panose="020B0604020202020204" pitchFamily="34" charset="0"/>
-                  <a:cs typeface="Arial" panose="020B0604020202020204" pitchFamily="34" charset="0"/>
-                </a:rPr>
-                <a:t>(N = 4,870)</a:t>
-              </a:r>
-              <a:endParaRPr kumimoji="1" lang="en-US" altLang="ko-KR" sz="1600" dirty="0">
-                <a:solidFill>
-                  <a:schemeClr val="tx1"/>
-                </a:solidFill>
-                <a:latin typeface="Arial" panose="020B0604020202020204" pitchFamily="34" charset="0"/>
-                <a:cs typeface="Arial" panose="020B0604020202020204" pitchFamily="34" charset="0"/>
-              </a:endParaRPr>
-            </a:p>
-          </p:txBody>
-        </p:sp>
-        <p:cxnSp>
-          <p:nvCxnSpPr>
-            <p:cNvPr id="6" name="직선 화살표 연결선 5">
-              <a:extLst>
-                <a:ext uri="{FF2B5EF4-FFF2-40B4-BE49-F238E27FC236}">
-                  <a16:creationId xmlns:a16="http://schemas.microsoft.com/office/drawing/2014/main" id="{61D26E03-35E6-CC0F-0F3B-AF6B2191F5B0}"/>
-                </a:ext>
-              </a:extLst>
-            </p:cNvPr>
-            <p:cNvCxnSpPr>
-              <a:cxnSpLocks/>
-              <a:stCxn id="37" idx="2"/>
-              <a:endCxn id="3" idx="0"/>
-            </p:cNvCxnSpPr>
-            <p:nvPr/>
-          </p:nvCxnSpPr>
-          <p:spPr>
-            <a:xfrm>
-              <a:off x="3695700" y="9115719"/>
-              <a:ext cx="0" cy="404638"/>
-            </a:xfrm>
-            <a:prstGeom prst="straightConnector1">
-              <a:avLst/>
-            </a:prstGeom>
-            <a:ln>
-              <a:solidFill>
-                <a:schemeClr val="tx1"/>
-              </a:solidFill>
-              <a:tailEnd type="triangle"/>
-            </a:ln>
-          </p:spPr>
-          <p:style>
-            <a:lnRef idx="2">
-              <a:schemeClr val="accent1"/>
-            </a:lnRef>
-            <a:fillRef idx="0">
-              <a:schemeClr val="accent1"/>
-            </a:fillRef>
-            <a:effectRef idx="1">
-              <a:schemeClr val="accent1"/>
-            </a:effectRef>
-            <a:fontRef idx="minor">
-              <a:schemeClr val="tx1"/>
-            </a:fontRef>
-          </p:style>
-        </p:cxnSp>
-        <p:cxnSp>
-          <p:nvCxnSpPr>
-            <p:cNvPr id="7" name="직선 화살표 연결선 6">
-              <a:extLst>
-                <a:ext uri="{FF2B5EF4-FFF2-40B4-BE49-F238E27FC236}">
-                  <a16:creationId xmlns:a16="http://schemas.microsoft.com/office/drawing/2014/main" id="{7DB62349-9991-245A-EDF7-07D3D2F3CEF1}"/>
-                </a:ext>
-              </a:extLst>
-            </p:cNvPr>
-            <p:cNvCxnSpPr>
-              <a:cxnSpLocks/>
-            </p:cNvCxnSpPr>
-            <p:nvPr/>
-          </p:nvCxnSpPr>
-          <p:spPr>
-            <a:xfrm>
-              <a:off x="3695700" y="9308758"/>
               <a:ext cx="2808000" cy="0"/>
             </a:xfrm>
             <a:prstGeom prst="straightConnector1">
